--- a/6 sem/Курсовая 2/Вербицкий Презентация.pptx
+++ b/6 sem/Курсовая 2/Вербицкий Презентация.pptx
@@ -5,7 +5,7 @@
     <p:sldMasterId id="2147483754" r:id="rId1"/>
   </p:sldMasterIdLst>
   <p:notesMasterIdLst>
-    <p:notesMasterId r:id="rId12"/>
+    <p:notesMasterId r:id="rId15"/>
   </p:notesMasterIdLst>
   <p:sldIdLst>
     <p:sldId id="257" r:id="rId2"/>
@@ -16,8 +16,11 @@
     <p:sldId id="274" r:id="rId7"/>
     <p:sldId id="275" r:id="rId8"/>
     <p:sldId id="268" r:id="rId9"/>
-    <p:sldId id="267" r:id="rId10"/>
-    <p:sldId id="272" r:id="rId11"/>
+    <p:sldId id="276" r:id="rId10"/>
+    <p:sldId id="277" r:id="rId11"/>
+    <p:sldId id="278" r:id="rId12"/>
+    <p:sldId id="267" r:id="rId13"/>
+    <p:sldId id="272" r:id="rId14"/>
   </p:sldIdLst>
   <p:sldSz cx="12192000" cy="6858000"/>
   <p:notesSz cx="6858000" cy="9144000"/>
@@ -124,6 +127,18 @@
 </p:presentation>
 </file>
 
+<file path=ppt/commentAuthors.xml><?xml version="1.0" encoding="utf-8"?>
+<p:cmAuthorLst xmlns:a="http://schemas.openxmlformats.org/drawingml/2006/main" xmlns:r="http://schemas.openxmlformats.org/officeDocument/2006/relationships" xmlns:p="http://schemas.openxmlformats.org/presentationml/2006/main">
+  <p:cmAuthor id="1" name="User" initials="U" lastIdx="1" clrIdx="0">
+    <p:extLst>
+      <p:ext uri="{19B8F6BF-5375-455C-9EA6-DF929625EA0E}">
+        <p15:presenceInfo xmlns:p15="http://schemas.microsoft.com/office/powerpoint/2012/main" userId="dc2bf7d8f73bafea" providerId="Windows Live"/>
+      </p:ext>
+    </p:extLst>
+  </p:cmAuthor>
+</p:cmAuthorLst>
+</file>
+
 <file path=ppt/notesMasters/notesMaster1.xml><?xml version="1.0" encoding="utf-8"?>
 <p:notesMaster xmlns:a="http://schemas.openxmlformats.org/drawingml/2006/main" xmlns:r="http://schemas.openxmlformats.org/officeDocument/2006/relationships" xmlns:p="http://schemas.openxmlformats.org/presentationml/2006/main">
   <p:cSld>
@@ -173,7 +188,7 @@
             </a:lvl1pPr>
           </a:lstStyle>
           <a:p>
-            <a:endParaRPr lang="ru-RU"/>
+            <a:endParaRPr lang="ru-RU" dirty="0"/>
           </a:p>
         </p:txBody>
       </p:sp>
@@ -206,9 +221,9 @@
           <a:p>
             <a:fld id="{3FDEFDDE-2A44-4BBF-BABD-A10EA21DB4D8}" type="datetimeFigureOut">
               <a:rPr lang="ru-RU" smtClean="0"/>
-              <a:t>19.12.2024</a:t>
+              <a:t>20.05.2025</a:t>
             </a:fld>
-            <a:endParaRPr lang="ru-RU"/>
+            <a:endParaRPr lang="ru-RU" dirty="0"/>
           </a:p>
         </p:txBody>
       </p:sp>
@@ -241,7 +256,7 @@
           <a:bodyPr vert="horz" lIns="91440" tIns="45720" rIns="91440" bIns="45720" rtlCol="0" anchor="ctr"/>
           <a:lstStyle/>
           <a:p>
-            <a:endParaRPr lang="ru-RU"/>
+            <a:endParaRPr lang="ru-RU" dirty="0"/>
           </a:p>
         </p:txBody>
       </p:sp>
@@ -331,7 +346,7 @@
             </a:lvl1pPr>
           </a:lstStyle>
           <a:p>
-            <a:endParaRPr lang="ru-RU"/>
+            <a:endParaRPr lang="ru-RU" dirty="0"/>
           </a:p>
         </p:txBody>
       </p:sp>
@@ -366,7 +381,7 @@
               <a:rPr lang="ru-RU" smtClean="0"/>
               <a:t>‹#›</a:t>
             </a:fld>
-            <a:endParaRPr lang="ru-RU"/>
+            <a:endParaRPr lang="ru-RU" dirty="0"/>
           </a:p>
         </p:txBody>
       </p:sp>
@@ -659,9 +674,9 @@
           <a:p>
             <a:fld id="{A09C8E4A-2E4A-413E-BEDC-5DE3A1C03C55}" type="datetime1">
               <a:rPr lang="ru-RU" smtClean="0"/>
-              <a:t>19.12.2024</a:t>
+              <a:t>20.05.2025</a:t>
             </a:fld>
-            <a:endParaRPr lang="ru-RU"/>
+            <a:endParaRPr lang="ru-RU" dirty="0"/>
           </a:p>
         </p:txBody>
       </p:sp>
@@ -680,7 +695,7 @@
           <a:bodyPr/>
           <a:lstStyle/>
           <a:p>
-            <a:endParaRPr lang="ru-RU"/>
+            <a:endParaRPr lang="ru-RU" dirty="0"/>
           </a:p>
         </p:txBody>
       </p:sp>
@@ -703,7 +718,7 @@
               <a:rPr lang="ru-RU" smtClean="0"/>
               <a:t>‹#›</a:t>
             </a:fld>
-            <a:endParaRPr lang="ru-RU"/>
+            <a:endParaRPr lang="ru-RU" dirty="0"/>
           </a:p>
         </p:txBody>
       </p:sp>
@@ -843,7 +858,7 @@
           </a:lstStyle>
           <a:p>
             <a:r>
-              <a:rPr lang="ru-RU" smtClean="0"/>
+              <a:rPr lang="ru-RU" dirty="0" smtClean="0"/>
               <a:t>Вставка рисунка</a:t>
             </a:r>
             <a:endParaRPr lang="en-US" dirty="0"/>
@@ -934,9 +949,9 @@
           <a:p>
             <a:fld id="{BEFAFFE0-DF88-43DD-8CBF-8A07A4BAAD23}" type="datetime1">
               <a:rPr lang="ru-RU" smtClean="0"/>
-              <a:t>19.12.2024</a:t>
+              <a:t>20.05.2025</a:t>
             </a:fld>
-            <a:endParaRPr lang="ru-RU"/>
+            <a:endParaRPr lang="ru-RU" dirty="0"/>
           </a:p>
         </p:txBody>
       </p:sp>
@@ -955,7 +970,7 @@
           <a:bodyPr/>
           <a:lstStyle/>
           <a:p>
-            <a:endParaRPr lang="ru-RU"/>
+            <a:endParaRPr lang="ru-RU" dirty="0"/>
           </a:p>
         </p:txBody>
       </p:sp>
@@ -978,7 +993,7 @@
               <a:rPr lang="ru-RU" smtClean="0"/>
               <a:t>‹#›</a:t>
             </a:fld>
-            <a:endParaRPr lang="ru-RU"/>
+            <a:endParaRPr lang="ru-RU" dirty="0"/>
           </a:p>
         </p:txBody>
       </p:sp>
@@ -1129,9 +1144,9 @@
           <a:p>
             <a:fld id="{BEFAFFE0-DF88-43DD-8CBF-8A07A4BAAD23}" type="datetime1">
               <a:rPr lang="ru-RU" smtClean="0"/>
-              <a:t>19.12.2024</a:t>
+              <a:t>20.05.2025</a:t>
             </a:fld>
-            <a:endParaRPr lang="ru-RU"/>
+            <a:endParaRPr lang="ru-RU" dirty="0"/>
           </a:p>
         </p:txBody>
       </p:sp>
@@ -1150,7 +1165,7 @@
           <a:bodyPr/>
           <a:lstStyle/>
           <a:p>
-            <a:endParaRPr lang="ru-RU"/>
+            <a:endParaRPr lang="ru-RU" dirty="0"/>
           </a:p>
         </p:txBody>
       </p:sp>
@@ -1173,7 +1188,7 @@
               <a:rPr lang="ru-RU" smtClean="0"/>
               <a:t>‹#›</a:t>
             </a:fld>
-            <a:endParaRPr lang="ru-RU"/>
+            <a:endParaRPr lang="ru-RU" dirty="0"/>
           </a:p>
         </p:txBody>
       </p:sp>
@@ -1403,9 +1418,9 @@
           <a:p>
             <a:fld id="{BEFAFFE0-DF88-43DD-8CBF-8A07A4BAAD23}" type="datetime1">
               <a:rPr lang="ru-RU" smtClean="0"/>
-              <a:t>19.12.2024</a:t>
+              <a:t>20.05.2025</a:t>
             </a:fld>
-            <a:endParaRPr lang="ru-RU"/>
+            <a:endParaRPr lang="ru-RU" dirty="0"/>
           </a:p>
         </p:txBody>
       </p:sp>
@@ -1424,7 +1439,7 @@
           <a:bodyPr/>
           <a:lstStyle/>
           <a:p>
-            <a:endParaRPr lang="ru-RU"/>
+            <a:endParaRPr lang="ru-RU" dirty="0"/>
           </a:p>
         </p:txBody>
       </p:sp>
@@ -1447,7 +1462,7 @@
               <a:rPr lang="ru-RU" smtClean="0"/>
               <a:t>‹#›</a:t>
             </a:fld>
-            <a:endParaRPr lang="ru-RU"/>
+            <a:endParaRPr lang="ru-RU" dirty="0"/>
           </a:p>
         </p:txBody>
       </p:sp>
@@ -1745,9 +1760,9 @@
           <a:p>
             <a:fld id="{BEFAFFE0-DF88-43DD-8CBF-8A07A4BAAD23}" type="datetime1">
               <a:rPr lang="ru-RU" smtClean="0"/>
-              <a:t>19.12.2024</a:t>
+              <a:t>20.05.2025</a:t>
             </a:fld>
-            <a:endParaRPr lang="ru-RU"/>
+            <a:endParaRPr lang="ru-RU" dirty="0"/>
           </a:p>
         </p:txBody>
       </p:sp>
@@ -1766,7 +1781,7 @@
           <a:bodyPr/>
           <a:lstStyle/>
           <a:p>
-            <a:endParaRPr lang="ru-RU"/>
+            <a:endParaRPr lang="ru-RU" dirty="0"/>
           </a:p>
         </p:txBody>
       </p:sp>
@@ -1789,7 +1804,7 @@
               <a:rPr lang="ru-RU" smtClean="0"/>
               <a:t>‹#›</a:t>
             </a:fld>
-            <a:endParaRPr lang="ru-RU"/>
+            <a:endParaRPr lang="ru-RU" dirty="0"/>
           </a:p>
         </p:txBody>
       </p:sp>
@@ -2369,9 +2384,9 @@
           <a:p>
             <a:fld id="{BEFAFFE0-DF88-43DD-8CBF-8A07A4BAAD23}" type="datetime1">
               <a:rPr lang="ru-RU" smtClean="0"/>
-              <a:t>19.12.2024</a:t>
+              <a:t>20.05.2025</a:t>
             </a:fld>
-            <a:endParaRPr lang="ru-RU"/>
+            <a:endParaRPr lang="ru-RU" dirty="0"/>
           </a:p>
         </p:txBody>
       </p:sp>
@@ -2390,7 +2405,7 @@
           <a:bodyPr/>
           <a:lstStyle/>
           <a:p>
-            <a:endParaRPr lang="ru-RU"/>
+            <a:endParaRPr lang="ru-RU" dirty="0"/>
           </a:p>
         </p:txBody>
       </p:sp>
@@ -2413,7 +2428,7 @@
               <a:rPr lang="ru-RU" smtClean="0"/>
               <a:t>‹#›</a:t>
             </a:fld>
-            <a:endParaRPr lang="ru-RU"/>
+            <a:endParaRPr lang="ru-RU" dirty="0"/>
           </a:p>
         </p:txBody>
       </p:sp>
@@ -2621,7 +2636,7 @@
           </a:lstStyle>
           <a:p>
             <a:r>
-              <a:rPr lang="ru-RU" smtClean="0"/>
+              <a:rPr lang="ru-RU" dirty="0" smtClean="0"/>
               <a:t>Вставка рисунка</a:t>
             </a:r>
             <a:endParaRPr lang="en-US" dirty="0"/>
@@ -2841,7 +2856,7 @@
           </a:lstStyle>
           <a:p>
             <a:r>
-              <a:rPr lang="ru-RU" smtClean="0"/>
+              <a:rPr lang="ru-RU" dirty="0" smtClean="0"/>
               <a:t>Вставка рисунка</a:t>
             </a:r>
             <a:endParaRPr lang="en-US" dirty="0"/>
@@ -3061,7 +3076,7 @@
           </a:lstStyle>
           <a:p>
             <a:r>
-              <a:rPr lang="ru-RU" smtClean="0"/>
+              <a:rPr lang="ru-RU" dirty="0" smtClean="0"/>
               <a:t>Вставка рисунка</a:t>
             </a:r>
             <a:endParaRPr lang="en-US" dirty="0"/>
@@ -3230,9 +3245,9 @@
           <a:p>
             <a:fld id="{BEFAFFE0-DF88-43DD-8CBF-8A07A4BAAD23}" type="datetime1">
               <a:rPr lang="ru-RU" smtClean="0"/>
-              <a:t>19.12.2024</a:t>
+              <a:t>20.05.2025</a:t>
             </a:fld>
-            <a:endParaRPr lang="ru-RU"/>
+            <a:endParaRPr lang="ru-RU" dirty="0"/>
           </a:p>
         </p:txBody>
       </p:sp>
@@ -3251,7 +3266,7 @@
           <a:bodyPr/>
           <a:lstStyle/>
           <a:p>
-            <a:endParaRPr lang="ru-RU"/>
+            <a:endParaRPr lang="ru-RU" dirty="0"/>
           </a:p>
         </p:txBody>
       </p:sp>
@@ -3274,7 +3289,7 @@
               <a:rPr lang="ru-RU" smtClean="0"/>
               <a:t>‹#›</a:t>
             </a:fld>
-            <a:endParaRPr lang="ru-RU"/>
+            <a:endParaRPr lang="ru-RU" dirty="0"/>
           </a:p>
         </p:txBody>
       </p:sp>
@@ -3401,9 +3416,9 @@
           <a:p>
             <a:fld id="{9C8E15E2-3E09-4D81-98E3-06E2C707847D}" type="datetime1">
               <a:rPr lang="ru-RU" smtClean="0"/>
-              <a:t>19.12.2024</a:t>
+              <a:t>20.05.2025</a:t>
             </a:fld>
-            <a:endParaRPr lang="ru-RU"/>
+            <a:endParaRPr lang="ru-RU" dirty="0"/>
           </a:p>
         </p:txBody>
       </p:sp>
@@ -3422,7 +3437,7 @@
           <a:bodyPr/>
           <a:lstStyle/>
           <a:p>
-            <a:endParaRPr lang="ru-RU"/>
+            <a:endParaRPr lang="ru-RU" dirty="0"/>
           </a:p>
         </p:txBody>
       </p:sp>
@@ -3445,7 +3460,7 @@
               <a:rPr lang="ru-RU" smtClean="0"/>
               <a:t>‹#›</a:t>
             </a:fld>
-            <a:endParaRPr lang="ru-RU"/>
+            <a:endParaRPr lang="ru-RU" dirty="0"/>
           </a:p>
         </p:txBody>
       </p:sp>
@@ -3581,9 +3596,9 @@
           <a:p>
             <a:fld id="{56C57D78-A709-441A-AD0B-74A42DADFA45}" type="datetime1">
               <a:rPr lang="ru-RU" smtClean="0"/>
-              <a:t>19.12.2024</a:t>
+              <a:t>20.05.2025</a:t>
             </a:fld>
-            <a:endParaRPr lang="ru-RU"/>
+            <a:endParaRPr lang="ru-RU" dirty="0"/>
           </a:p>
         </p:txBody>
       </p:sp>
@@ -3602,7 +3617,7 @@
           <a:bodyPr/>
           <a:lstStyle/>
           <a:p>
-            <a:endParaRPr lang="ru-RU"/>
+            <a:endParaRPr lang="ru-RU" dirty="0"/>
           </a:p>
         </p:txBody>
       </p:sp>
@@ -3625,7 +3640,7 @@
               <a:rPr lang="ru-RU" smtClean="0"/>
               <a:t>‹#›</a:t>
             </a:fld>
-            <a:endParaRPr lang="ru-RU"/>
+            <a:endParaRPr lang="ru-RU" dirty="0"/>
           </a:p>
         </p:txBody>
       </p:sp>
@@ -3751,9 +3766,9 @@
           <a:p>
             <a:fld id="{0E93EC04-A0F1-4824-8803-1818EA1A9513}" type="datetime1">
               <a:rPr lang="ru-RU" smtClean="0"/>
-              <a:t>19.12.2024</a:t>
+              <a:t>20.05.2025</a:t>
             </a:fld>
-            <a:endParaRPr lang="ru-RU"/>
+            <a:endParaRPr lang="ru-RU" dirty="0"/>
           </a:p>
         </p:txBody>
       </p:sp>
@@ -3772,7 +3787,7 @@
           <a:bodyPr/>
           <a:lstStyle/>
           <a:p>
-            <a:endParaRPr lang="ru-RU"/>
+            <a:endParaRPr lang="ru-RU" dirty="0"/>
           </a:p>
         </p:txBody>
       </p:sp>
@@ -3795,7 +3810,7 @@
               <a:rPr lang="ru-RU" smtClean="0"/>
               <a:t>‹#›</a:t>
             </a:fld>
-            <a:endParaRPr lang="ru-RU"/>
+            <a:endParaRPr lang="ru-RU" dirty="0"/>
           </a:p>
         </p:txBody>
       </p:sp>
@@ -3998,9 +4013,9 @@
           <a:p>
             <a:fld id="{2D78007B-9FE6-409C-AB6E-2373B6C9CBC6}" type="datetime1">
               <a:rPr lang="ru-RU" smtClean="0"/>
-              <a:t>19.12.2024</a:t>
+              <a:t>20.05.2025</a:t>
             </a:fld>
-            <a:endParaRPr lang="ru-RU"/>
+            <a:endParaRPr lang="ru-RU" dirty="0"/>
           </a:p>
         </p:txBody>
       </p:sp>
@@ -4019,7 +4034,7 @@
           <a:bodyPr/>
           <a:lstStyle/>
           <a:p>
-            <a:endParaRPr lang="ru-RU"/>
+            <a:endParaRPr lang="ru-RU" dirty="0"/>
           </a:p>
         </p:txBody>
       </p:sp>
@@ -4042,7 +4057,7 @@
               <a:rPr lang="ru-RU" smtClean="0"/>
               <a:t>‹#›</a:t>
             </a:fld>
-            <a:endParaRPr lang="ru-RU"/>
+            <a:endParaRPr lang="ru-RU" dirty="0"/>
           </a:p>
         </p:txBody>
       </p:sp>
@@ -4290,9 +4305,9 @@
           <a:p>
             <a:fld id="{3BF0056B-C17E-4EF8-B1DE-1F77794A0394}" type="datetime1">
               <a:rPr lang="ru-RU" smtClean="0"/>
-              <a:t>19.12.2024</a:t>
+              <a:t>20.05.2025</a:t>
             </a:fld>
-            <a:endParaRPr lang="ru-RU"/>
+            <a:endParaRPr lang="ru-RU" dirty="0"/>
           </a:p>
         </p:txBody>
       </p:sp>
@@ -4311,7 +4326,7 @@
           <a:bodyPr/>
           <a:lstStyle/>
           <a:p>
-            <a:endParaRPr lang="ru-RU"/>
+            <a:endParaRPr lang="ru-RU" dirty="0"/>
           </a:p>
         </p:txBody>
       </p:sp>
@@ -4334,7 +4349,7 @@
               <a:rPr lang="ru-RU" smtClean="0"/>
               <a:t>‹#›</a:t>
             </a:fld>
-            <a:endParaRPr lang="ru-RU"/>
+            <a:endParaRPr lang="ru-RU" dirty="0"/>
           </a:p>
         </p:txBody>
       </p:sp>
@@ -4734,9 +4749,9 @@
           <a:p>
             <a:fld id="{34C5F9D0-A99D-48BA-92BA-6371EC58B206}" type="datetime1">
               <a:rPr lang="ru-RU" smtClean="0"/>
-              <a:t>19.12.2024</a:t>
+              <a:t>20.05.2025</a:t>
             </a:fld>
-            <a:endParaRPr lang="ru-RU"/>
+            <a:endParaRPr lang="ru-RU" dirty="0"/>
           </a:p>
         </p:txBody>
       </p:sp>
@@ -4755,7 +4770,7 @@
           <a:bodyPr/>
           <a:lstStyle/>
           <a:p>
-            <a:endParaRPr lang="ru-RU"/>
+            <a:endParaRPr lang="ru-RU" dirty="0"/>
           </a:p>
         </p:txBody>
       </p:sp>
@@ -4778,7 +4793,7 @@
               <a:rPr lang="ru-RU" smtClean="0"/>
               <a:t>‹#›</a:t>
             </a:fld>
-            <a:endParaRPr lang="ru-RU"/>
+            <a:endParaRPr lang="ru-RU" dirty="0"/>
           </a:p>
         </p:txBody>
       </p:sp>
@@ -4852,9 +4867,9 @@
           <a:p>
             <a:fld id="{697C6291-298E-45C9-9B23-9FED23A7FFFC}" type="datetime1">
               <a:rPr lang="ru-RU" smtClean="0"/>
-              <a:t>19.12.2024</a:t>
+              <a:t>20.05.2025</a:t>
             </a:fld>
-            <a:endParaRPr lang="ru-RU"/>
+            <a:endParaRPr lang="ru-RU" dirty="0"/>
           </a:p>
         </p:txBody>
       </p:sp>
@@ -4873,7 +4888,7 @@
           <a:bodyPr/>
           <a:lstStyle/>
           <a:p>
-            <a:endParaRPr lang="ru-RU"/>
+            <a:endParaRPr lang="ru-RU" dirty="0"/>
           </a:p>
         </p:txBody>
       </p:sp>
@@ -4896,7 +4911,7 @@
               <a:rPr lang="ru-RU" smtClean="0"/>
               <a:t>‹#›</a:t>
             </a:fld>
-            <a:endParaRPr lang="ru-RU"/>
+            <a:endParaRPr lang="ru-RU" dirty="0"/>
           </a:p>
         </p:txBody>
       </p:sp>
@@ -4947,9 +4962,9 @@
           <a:p>
             <a:fld id="{CBC1753A-01D4-47E3-AE75-060371C49304}" type="datetime1">
               <a:rPr lang="ru-RU" smtClean="0"/>
-              <a:t>19.12.2024</a:t>
+              <a:t>20.05.2025</a:t>
             </a:fld>
-            <a:endParaRPr lang="ru-RU"/>
+            <a:endParaRPr lang="ru-RU" dirty="0"/>
           </a:p>
         </p:txBody>
       </p:sp>
@@ -4968,7 +4983,7 @@
           <a:bodyPr/>
           <a:lstStyle/>
           <a:p>
-            <a:endParaRPr lang="ru-RU"/>
+            <a:endParaRPr lang="ru-RU" dirty="0"/>
           </a:p>
         </p:txBody>
       </p:sp>
@@ -4991,7 +5006,7 @@
               <a:rPr lang="ru-RU" smtClean="0"/>
               <a:t>‹#›</a:t>
             </a:fld>
-            <a:endParaRPr lang="ru-RU"/>
+            <a:endParaRPr lang="ru-RU" dirty="0"/>
           </a:p>
         </p:txBody>
       </p:sp>
@@ -5226,9 +5241,9 @@
           <a:p>
             <a:fld id="{6A1ABC81-1B16-4178-9E4E-4D5861048861}" type="datetime1">
               <a:rPr lang="ru-RU" smtClean="0"/>
-              <a:t>19.12.2024</a:t>
+              <a:t>20.05.2025</a:t>
             </a:fld>
-            <a:endParaRPr lang="ru-RU"/>
+            <a:endParaRPr lang="ru-RU" dirty="0"/>
           </a:p>
         </p:txBody>
       </p:sp>
@@ -5247,7 +5262,7 @@
           <a:bodyPr/>
           <a:lstStyle/>
           <a:p>
-            <a:endParaRPr lang="ru-RU"/>
+            <a:endParaRPr lang="ru-RU" dirty="0"/>
           </a:p>
         </p:txBody>
       </p:sp>
@@ -5270,7 +5285,7 @@
               <a:rPr lang="ru-RU" smtClean="0"/>
               <a:t>‹#›</a:t>
             </a:fld>
-            <a:endParaRPr lang="ru-RU"/>
+            <a:endParaRPr lang="ru-RU" dirty="0"/>
           </a:p>
         </p:txBody>
       </p:sp>
@@ -5410,7 +5425,7 @@
           </a:lstStyle>
           <a:p>
             <a:r>
-              <a:rPr lang="ru-RU" smtClean="0"/>
+              <a:rPr lang="ru-RU" dirty="0" smtClean="0"/>
               <a:t>Вставка рисунка</a:t>
             </a:r>
             <a:endParaRPr lang="en-US" dirty="0"/>
@@ -5501,9 +5516,9 @@
           <a:p>
             <a:fld id="{B031D518-8C7D-4E78-B1AF-4199671CCC87}" type="datetime1">
               <a:rPr lang="ru-RU" smtClean="0"/>
-              <a:t>19.12.2024</a:t>
+              <a:t>20.05.2025</a:t>
             </a:fld>
-            <a:endParaRPr lang="ru-RU"/>
+            <a:endParaRPr lang="ru-RU" dirty="0"/>
           </a:p>
         </p:txBody>
       </p:sp>
@@ -5522,7 +5537,7 @@
           <a:bodyPr/>
           <a:lstStyle/>
           <a:p>
-            <a:endParaRPr lang="ru-RU"/>
+            <a:endParaRPr lang="ru-RU" dirty="0"/>
           </a:p>
         </p:txBody>
       </p:sp>
@@ -5545,7 +5560,7 @@
               <a:rPr lang="ru-RU" smtClean="0"/>
               <a:t>‹#›</a:t>
             </a:fld>
-            <a:endParaRPr lang="ru-RU"/>
+            <a:endParaRPr lang="ru-RU" dirty="0"/>
           </a:p>
         </p:txBody>
       </p:sp>
@@ -5930,9 +5945,9 @@
           <a:p>
             <a:fld id="{BEFAFFE0-DF88-43DD-8CBF-8A07A4BAAD23}" type="datetime1">
               <a:rPr lang="ru-RU" smtClean="0"/>
-              <a:t>19.12.2024</a:t>
+              <a:t>20.05.2025</a:t>
             </a:fld>
-            <a:endParaRPr lang="ru-RU"/>
+            <a:endParaRPr lang="ru-RU" dirty="0"/>
           </a:p>
         </p:txBody>
       </p:sp>
@@ -5970,7 +5985,7 @@
             </a:lvl1pPr>
           </a:lstStyle>
           <a:p>
-            <a:endParaRPr lang="ru-RU"/>
+            <a:endParaRPr lang="ru-RU" dirty="0"/>
           </a:p>
         </p:txBody>
       </p:sp>
@@ -6011,7 +6026,7 @@
               <a:rPr lang="ru-RU" smtClean="0"/>
               <a:t>‹#›</a:t>
             </a:fld>
-            <a:endParaRPr lang="ru-RU"/>
+            <a:endParaRPr lang="ru-RU" dirty="0"/>
           </a:p>
         </p:txBody>
       </p:sp>
@@ -6657,13 +6672,21 @@
               </a:spcAft>
             </a:pPr>
             <a:r>
+              <a:rPr lang="ru-RU" b="1" dirty="0" smtClean="0">
+                <a:latin typeface="Times New Roman" panose="02020603050405020304" pitchFamily="18" charset="0"/>
+                <a:ea typeface="Times New Roman" panose="02020603050405020304" pitchFamily="18" charset="0"/>
+                <a:cs typeface="Times New Roman" panose="02020603050405020304" pitchFamily="18" charset="0"/>
+              </a:rPr>
+              <a:t>АНАЛИЗ</a:t>
+            </a:r>
+            <a:r>
               <a:rPr lang="ru-RU" sz="1800" b="1" dirty="0" smtClean="0">
                 <a:effectLst/>
                 <a:latin typeface="Times New Roman" panose="02020603050405020304" pitchFamily="18" charset="0"/>
                 <a:ea typeface="Times New Roman" panose="02020603050405020304" pitchFamily="18" charset="0"/>
                 <a:cs typeface="Times New Roman" panose="02020603050405020304" pitchFamily="18" charset="0"/>
               </a:rPr>
-              <a:t>ИЗВЛЕЧЕНИЕ И СТРУКТУРИРОВАНИЕ ДАННЫХ ПОЛЬЗОВАТЕЛЕЙ ИЗ СОЦИАЛЬНОЙ СЕТИ ВКОНТАКТЕ</a:t>
+              <a:t> ДАННЫХ ПОЛЬЗОВАТЕЛЕЙ ИЗ СОЦИАЛЬНОЙ СЕТИ ВКОНТАКТЕ</a:t>
             </a:r>
             <a:endParaRPr lang="ru-RU" sz="1800" dirty="0">
               <a:effectLst/>
@@ -6885,6 +6908,548 @@
           <p:cNvPr id="2" name="Заголовок 1">
             <a:extLst>
               <a:ext uri="{FF2B5EF4-FFF2-40B4-BE49-F238E27FC236}">
+                <a16:creationId xmlns:a16="http://schemas.microsoft.com/office/drawing/2014/main" id="{3FF7B919-DE1E-4C1D-A147-B825BE3277D0}"/>
+              </a:ext>
+            </a:extLst>
+          </p:cNvPr>
+          <p:cNvSpPr>
+            <a:spLocks noGrp="1"/>
+          </p:cNvSpPr>
+          <p:nvPr>
+            <p:ph type="title"/>
+          </p:nvPr>
+        </p:nvSpPr>
+        <p:spPr>
+          <a:xfrm>
+            <a:off x="838200" y="136526"/>
+            <a:ext cx="10515600" cy="925020"/>
+          </a:xfrm>
+        </p:spPr>
+        <p:txBody>
+          <a:bodyPr>
+            <a:normAutofit fontScale="90000"/>
+          </a:bodyPr>
+          <a:lstStyle/>
+          <a:p>
+            <a:pPr algn="ctr"/>
+            <a:r>
+              <a:rPr lang="ru-RU" dirty="0"/>
+              <a:t>Группировка пользователей по числу подписчиков и активности</a:t>
+            </a:r>
+            <a:endParaRPr lang="ru-RU" dirty="0">
+              <a:latin typeface="Times New Roman" panose="02020603050405020304" pitchFamily="18" charset="0"/>
+              <a:cs typeface="Times New Roman" panose="02020603050405020304" pitchFamily="18" charset="0"/>
+            </a:endParaRPr>
+          </a:p>
+        </p:txBody>
+      </p:sp>
+      <p:sp>
+        <p:nvSpPr>
+          <p:cNvPr id="3" name="Объект 2"/>
+          <p:cNvSpPr>
+            <a:spLocks noGrp="1"/>
+          </p:cNvSpPr>
+          <p:nvPr>
+            <p:ph idx="1"/>
+          </p:nvPr>
+        </p:nvSpPr>
+        <p:spPr/>
+        <p:txBody>
+          <a:bodyPr/>
+          <a:lstStyle/>
+          <a:p>
+            <a:endParaRPr lang="ru-RU" dirty="0"/>
+          </a:p>
+        </p:txBody>
+      </p:sp>
+      <p:sp>
+        <p:nvSpPr>
+          <p:cNvPr id="4" name="Номер слайда 3">
+            <a:extLst>
+              <a:ext uri="{FF2B5EF4-FFF2-40B4-BE49-F238E27FC236}">
+                <a16:creationId xmlns:a16="http://schemas.microsoft.com/office/drawing/2014/main" id="{05CCAD02-D324-4E74-BBB2-F96D3E7B6AC4}"/>
+              </a:ext>
+            </a:extLst>
+          </p:cNvPr>
+          <p:cNvSpPr>
+            <a:spLocks noGrp="1"/>
+          </p:cNvSpPr>
+          <p:nvPr>
+            <p:ph type="sldNum" sz="quarter" idx="12"/>
+          </p:nvPr>
+        </p:nvSpPr>
+        <p:spPr/>
+        <p:txBody>
+          <a:bodyPr/>
+          <a:lstStyle/>
+          <a:p>
+            <a:fld id="{9C583E25-F424-4E62-AB77-2CD20878E81E}" type="slidenum">
+              <a:rPr lang="ru-RU" smtClean="0"/>
+              <a:t>10</a:t>
+            </a:fld>
+            <a:endParaRPr lang="ru-RU" dirty="0"/>
+          </a:p>
+        </p:txBody>
+      </p:sp>
+      <p:pic>
+        <p:nvPicPr>
+          <p:cNvPr id="6" name="Рисунок 5"/>
+          <p:cNvPicPr/>
+          <p:nvPr/>
+        </p:nvPicPr>
+        <p:blipFill>
+          <a:blip r:embed="rId2"/>
+          <a:stretch>
+            <a:fillRect/>
+          </a:stretch>
+        </p:blipFill>
+        <p:spPr>
+          <a:xfrm>
+            <a:off x="1415702" y="1681941"/>
+            <a:ext cx="8936837" cy="4838931"/>
+          </a:xfrm>
+          <a:prstGeom prst="rect">
+            <a:avLst/>
+          </a:prstGeom>
+        </p:spPr>
+      </p:pic>
+    </p:spTree>
+    <p:extLst>
+      <p:ext uri="{BB962C8B-B14F-4D97-AF65-F5344CB8AC3E}">
+        <p14:creationId xmlns:p14="http://schemas.microsoft.com/office/powerpoint/2010/main" val="485209178"/>
+      </p:ext>
+    </p:extLst>
+  </p:cSld>
+  <p:clrMapOvr>
+    <a:masterClrMapping/>
+  </p:clrMapOvr>
+  <p:timing>
+    <p:tnLst>
+      <p:par>
+        <p:cTn id="1" dur="indefinite" restart="never" nodeType="tmRoot"/>
+      </p:par>
+    </p:tnLst>
+  </p:timing>
+</p:sld>
+</file>
+
+<file path=ppt/slides/slide11.xml><?xml version="1.0" encoding="utf-8"?>
+<p:sld xmlns:a="http://schemas.openxmlformats.org/drawingml/2006/main" xmlns:r="http://schemas.openxmlformats.org/officeDocument/2006/relationships" xmlns:p="http://schemas.openxmlformats.org/presentationml/2006/main">
+  <p:cSld>
+    <p:spTree>
+      <p:nvGrpSpPr>
+        <p:cNvPr id="1" name=""/>
+        <p:cNvGrpSpPr/>
+        <p:nvPr/>
+      </p:nvGrpSpPr>
+      <p:grpSpPr>
+        <a:xfrm>
+          <a:off x="0" y="0"/>
+          <a:ext cx="0" cy="0"/>
+          <a:chOff x="0" y="0"/>
+          <a:chExt cx="0" cy="0"/>
+        </a:xfrm>
+      </p:grpSpPr>
+      <p:sp>
+        <p:nvSpPr>
+          <p:cNvPr id="2" name="Заголовок 1">
+            <a:extLst>
+              <a:ext uri="{FF2B5EF4-FFF2-40B4-BE49-F238E27FC236}">
+                <a16:creationId xmlns:a16="http://schemas.microsoft.com/office/drawing/2014/main" id="{3FF7B919-DE1E-4C1D-A147-B825BE3277D0}"/>
+              </a:ext>
+            </a:extLst>
+          </p:cNvPr>
+          <p:cNvSpPr>
+            <a:spLocks noGrp="1"/>
+          </p:cNvSpPr>
+          <p:nvPr>
+            <p:ph type="title"/>
+          </p:nvPr>
+        </p:nvSpPr>
+        <p:spPr>
+          <a:xfrm>
+            <a:off x="764310" y="814024"/>
+            <a:ext cx="10515600" cy="925020"/>
+          </a:xfrm>
+        </p:spPr>
+        <p:txBody>
+          <a:bodyPr>
+            <a:normAutofit fontScale="90000"/>
+          </a:bodyPr>
+          <a:lstStyle/>
+          <a:p>
+            <a:r>
+              <a:rPr lang="ru-RU" dirty="0"/>
+              <a:t>Группировка пользователей по городам</a:t>
+            </a:r>
+          </a:p>
+        </p:txBody>
+      </p:sp>
+      <p:sp>
+        <p:nvSpPr>
+          <p:cNvPr id="3" name="Объект 2"/>
+          <p:cNvSpPr>
+            <a:spLocks noGrp="1"/>
+          </p:cNvSpPr>
+          <p:nvPr>
+            <p:ph idx="1"/>
+          </p:nvPr>
+        </p:nvSpPr>
+        <p:spPr/>
+        <p:txBody>
+          <a:bodyPr/>
+          <a:lstStyle/>
+          <a:p>
+            <a:endParaRPr lang="ru-RU" dirty="0"/>
+          </a:p>
+        </p:txBody>
+      </p:sp>
+      <p:sp>
+        <p:nvSpPr>
+          <p:cNvPr id="4" name="Номер слайда 3">
+            <a:extLst>
+              <a:ext uri="{FF2B5EF4-FFF2-40B4-BE49-F238E27FC236}">
+                <a16:creationId xmlns:a16="http://schemas.microsoft.com/office/drawing/2014/main" id="{05CCAD02-D324-4E74-BBB2-F96D3E7B6AC4}"/>
+              </a:ext>
+            </a:extLst>
+          </p:cNvPr>
+          <p:cNvSpPr>
+            <a:spLocks noGrp="1"/>
+          </p:cNvSpPr>
+          <p:nvPr>
+            <p:ph type="sldNum" sz="quarter" idx="12"/>
+          </p:nvPr>
+        </p:nvSpPr>
+        <p:spPr/>
+        <p:txBody>
+          <a:bodyPr/>
+          <a:lstStyle/>
+          <a:p>
+            <a:fld id="{9C583E25-F424-4E62-AB77-2CD20878E81E}" type="slidenum">
+              <a:rPr lang="ru-RU" smtClean="0"/>
+              <a:t>11</a:t>
+            </a:fld>
+            <a:endParaRPr lang="ru-RU" dirty="0"/>
+          </a:p>
+        </p:txBody>
+      </p:sp>
+      <p:pic>
+        <p:nvPicPr>
+          <p:cNvPr id="7" name="Рисунок 6"/>
+          <p:cNvPicPr/>
+          <p:nvPr/>
+        </p:nvPicPr>
+        <p:blipFill>
+          <a:blip r:embed="rId2"/>
+          <a:stretch>
+            <a:fillRect/>
+          </a:stretch>
+        </p:blipFill>
+        <p:spPr>
+          <a:xfrm>
+            <a:off x="1481715" y="1578061"/>
+            <a:ext cx="8946140" cy="4942812"/>
+          </a:xfrm>
+          <a:prstGeom prst="rect">
+            <a:avLst/>
+          </a:prstGeom>
+        </p:spPr>
+      </p:pic>
+    </p:spTree>
+    <p:extLst>
+      <p:ext uri="{BB962C8B-B14F-4D97-AF65-F5344CB8AC3E}">
+        <p14:creationId xmlns:p14="http://schemas.microsoft.com/office/powerpoint/2010/main" val="366080109"/>
+      </p:ext>
+    </p:extLst>
+  </p:cSld>
+  <p:clrMapOvr>
+    <a:masterClrMapping/>
+  </p:clrMapOvr>
+  <p:timing>
+    <p:tnLst>
+      <p:par>
+        <p:cTn id="1" dur="indefinite" restart="never" nodeType="tmRoot"/>
+      </p:par>
+    </p:tnLst>
+  </p:timing>
+</p:sld>
+</file>
+
+<file path=ppt/slides/slide12.xml><?xml version="1.0" encoding="utf-8"?>
+<p:sld xmlns:a="http://schemas.openxmlformats.org/drawingml/2006/main" xmlns:r="http://schemas.openxmlformats.org/officeDocument/2006/relationships" xmlns:p="http://schemas.openxmlformats.org/presentationml/2006/main">
+  <p:cSld>
+    <p:spTree>
+      <p:nvGrpSpPr>
+        <p:cNvPr id="1" name=""/>
+        <p:cNvGrpSpPr/>
+        <p:nvPr/>
+      </p:nvGrpSpPr>
+      <p:grpSpPr>
+        <a:xfrm>
+          <a:off x="0" y="0"/>
+          <a:ext cx="0" cy="0"/>
+          <a:chOff x="0" y="0"/>
+          <a:chExt cx="0" cy="0"/>
+        </a:xfrm>
+      </p:grpSpPr>
+      <p:sp>
+        <p:nvSpPr>
+          <p:cNvPr id="2" name="Заголовок 1">
+            <a:extLst>
+              <a:ext uri="{FF2B5EF4-FFF2-40B4-BE49-F238E27FC236}">
+                <a16:creationId xmlns:a16="http://schemas.microsoft.com/office/drawing/2014/main" id="{6018217D-050D-4C6C-AC36-3B7141D19618}"/>
+              </a:ext>
+            </a:extLst>
+          </p:cNvPr>
+          <p:cNvSpPr>
+            <a:spLocks noGrp="1"/>
+          </p:cNvSpPr>
+          <p:nvPr>
+            <p:ph type="title"/>
+          </p:nvPr>
+        </p:nvSpPr>
+        <p:spPr>
+          <a:xfrm>
+            <a:off x="838200" y="365126"/>
+            <a:ext cx="10515600" cy="713866"/>
+          </a:xfrm>
+        </p:spPr>
+        <p:txBody>
+          <a:bodyPr>
+            <a:normAutofit/>
+          </a:bodyPr>
+          <a:lstStyle/>
+          <a:p>
+            <a:pPr algn="ctr"/>
+            <a:r>
+              <a:rPr lang="ru-RU" sz="3600" dirty="0">
+                <a:latin typeface="Times New Roman" panose="02020603050405020304" pitchFamily="18" charset="0"/>
+                <a:cs typeface="Times New Roman" panose="02020603050405020304" pitchFamily="18" charset="0"/>
+              </a:rPr>
+              <a:t>Итак, в курсовой работе:</a:t>
+            </a:r>
+          </a:p>
+        </p:txBody>
+      </p:sp>
+      <p:sp>
+        <p:nvSpPr>
+          <p:cNvPr id="3" name="Объект 2">
+            <a:extLst>
+              <a:ext uri="{FF2B5EF4-FFF2-40B4-BE49-F238E27FC236}">
+                <a16:creationId xmlns:a16="http://schemas.microsoft.com/office/drawing/2014/main" id="{7F9E0BEE-61E6-4297-A96C-FA07970DEF71}"/>
+              </a:ext>
+            </a:extLst>
+          </p:cNvPr>
+          <p:cNvSpPr>
+            <a:spLocks noGrp="1"/>
+          </p:cNvSpPr>
+          <p:nvPr>
+            <p:ph idx="1"/>
+          </p:nvPr>
+        </p:nvSpPr>
+        <p:spPr>
+          <a:xfrm>
+            <a:off x="838200" y="2140870"/>
+            <a:ext cx="10515600" cy="3006166"/>
+          </a:xfrm>
+        </p:spPr>
+        <p:txBody>
+          <a:bodyPr>
+            <a:normAutofit/>
+          </a:bodyPr>
+          <a:lstStyle/>
+          <a:p>
+            <a:r>
+              <a:rPr lang="ru-RU" dirty="0" smtClean="0">
+                <a:latin typeface="Times New Roman" panose="02020603050405020304" pitchFamily="18" charset="0"/>
+                <a:cs typeface="Times New Roman" panose="02020603050405020304" pitchFamily="18" charset="0"/>
+              </a:rPr>
+              <a:t>Изучены </a:t>
+            </a:r>
+            <a:r>
+              <a:rPr lang="ru-RU" dirty="0">
+                <a:latin typeface="Times New Roman" panose="02020603050405020304" pitchFamily="18" charset="0"/>
+                <a:cs typeface="Times New Roman" panose="02020603050405020304" pitchFamily="18" charset="0"/>
+              </a:rPr>
+              <a:t>специализированные методы для извлечения данных пользователей из социальных сетей</a:t>
+            </a:r>
+            <a:r>
+              <a:rPr lang="ru-RU" dirty="0" smtClean="0">
+                <a:latin typeface="Times New Roman" panose="02020603050405020304" pitchFamily="18" charset="0"/>
+                <a:cs typeface="Times New Roman" panose="02020603050405020304" pitchFamily="18" charset="0"/>
+              </a:rPr>
+              <a:t>;</a:t>
+            </a:r>
+            <a:endParaRPr lang="ru-RU" dirty="0">
+              <a:latin typeface="Times New Roman" panose="02020603050405020304" pitchFamily="18" charset="0"/>
+              <a:cs typeface="Times New Roman" panose="02020603050405020304" pitchFamily="18" charset="0"/>
+            </a:endParaRPr>
+          </a:p>
+          <a:p>
+            <a:r>
+              <a:rPr lang="ru-RU" dirty="0" smtClean="0">
+                <a:latin typeface="Times New Roman" panose="02020603050405020304" pitchFamily="18" charset="0"/>
+                <a:cs typeface="Times New Roman" panose="02020603050405020304" pitchFamily="18" charset="0"/>
+              </a:rPr>
+              <a:t>Доработан </a:t>
+            </a:r>
+            <a:r>
+              <a:rPr lang="ru-RU" dirty="0">
+                <a:latin typeface="Times New Roman" panose="02020603050405020304" pitchFamily="18" charset="0"/>
+                <a:cs typeface="Times New Roman" panose="02020603050405020304" pitchFamily="18" charset="0"/>
+              </a:rPr>
+              <a:t>алгоритм для извлечения данных с учетом требований безопасности и ограничений </a:t>
+            </a:r>
+            <a:r>
+              <a:rPr lang="en-US" dirty="0" smtClean="0">
+                <a:latin typeface="Times New Roman" panose="02020603050405020304" pitchFamily="18" charset="0"/>
+                <a:cs typeface="Times New Roman" panose="02020603050405020304" pitchFamily="18" charset="0"/>
+              </a:rPr>
+              <a:t>API;</a:t>
+            </a:r>
+          </a:p>
+          <a:p>
+            <a:r>
+              <a:rPr lang="ru-RU" dirty="0" smtClean="0">
+                <a:latin typeface="Times New Roman" panose="02020603050405020304" pitchFamily="18" charset="0"/>
+                <a:cs typeface="Times New Roman" panose="02020603050405020304" pitchFamily="18" charset="0"/>
+              </a:rPr>
+              <a:t>Реализована программа, </a:t>
+            </a:r>
+            <a:r>
+              <a:rPr lang="ru-RU" dirty="0">
+                <a:latin typeface="Times New Roman" panose="02020603050405020304" pitchFamily="18" charset="0"/>
+                <a:cs typeface="Times New Roman" panose="02020603050405020304" pitchFamily="18" charset="0"/>
+              </a:rPr>
+              <a:t>которая </a:t>
+            </a:r>
+            <a:r>
+              <a:rPr lang="ru-RU" dirty="0" smtClean="0">
+                <a:latin typeface="Times New Roman" panose="02020603050405020304" pitchFamily="18" charset="0"/>
+                <a:cs typeface="Times New Roman" panose="02020603050405020304" pitchFamily="18" charset="0"/>
+              </a:rPr>
+              <a:t>анализирует </a:t>
+            </a:r>
+            <a:r>
+              <a:rPr lang="ru-RU">
+                <a:latin typeface="Times New Roman" panose="02020603050405020304" pitchFamily="18" charset="0"/>
+                <a:cs typeface="Times New Roman" panose="02020603050405020304" pitchFamily="18" charset="0"/>
+              </a:rPr>
+              <a:t>и </a:t>
+            </a:r>
+            <a:r>
+              <a:rPr lang="ru-RU" smtClean="0">
+                <a:latin typeface="Times New Roman" panose="02020603050405020304" pitchFamily="18" charset="0"/>
+                <a:cs typeface="Times New Roman" panose="02020603050405020304" pitchFamily="18" charset="0"/>
+              </a:rPr>
+              <a:t>визуализирует </a:t>
+            </a:r>
+            <a:r>
+              <a:rPr lang="ru-RU" dirty="0">
+                <a:latin typeface="Times New Roman" panose="02020603050405020304" pitchFamily="18" charset="0"/>
+                <a:cs typeface="Times New Roman" panose="02020603050405020304" pitchFamily="18" charset="0"/>
+              </a:rPr>
+              <a:t>полученные через </a:t>
+            </a:r>
+            <a:r>
+              <a:rPr lang="en-US" dirty="0">
+                <a:latin typeface="Times New Roman" panose="02020603050405020304" pitchFamily="18" charset="0"/>
+                <a:cs typeface="Times New Roman" panose="02020603050405020304" pitchFamily="18" charset="0"/>
+              </a:rPr>
+              <a:t>API </a:t>
+            </a:r>
+            <a:r>
+              <a:rPr lang="ru-RU" dirty="0">
+                <a:latin typeface="Times New Roman" panose="02020603050405020304" pitchFamily="18" charset="0"/>
+                <a:cs typeface="Times New Roman" panose="02020603050405020304" pitchFamily="18" charset="0"/>
+              </a:rPr>
+              <a:t>данные</a:t>
+            </a:r>
+            <a:r>
+              <a:rPr lang="ru-RU" dirty="0" smtClean="0">
+                <a:latin typeface="Times New Roman" panose="02020603050405020304" pitchFamily="18" charset="0"/>
+                <a:cs typeface="Times New Roman" panose="02020603050405020304" pitchFamily="18" charset="0"/>
+              </a:rPr>
+              <a:t>.</a:t>
+            </a:r>
+            <a:endParaRPr lang="ru-RU" dirty="0">
+              <a:latin typeface="Times New Roman" panose="02020603050405020304" pitchFamily="18" charset="0"/>
+              <a:cs typeface="Times New Roman" panose="02020603050405020304" pitchFamily="18" charset="0"/>
+            </a:endParaRPr>
+          </a:p>
+        </p:txBody>
+      </p:sp>
+      <p:sp>
+        <p:nvSpPr>
+          <p:cNvPr id="4" name="Номер слайда 3">
+            <a:extLst>
+              <a:ext uri="{FF2B5EF4-FFF2-40B4-BE49-F238E27FC236}">
+                <a16:creationId xmlns:a16="http://schemas.microsoft.com/office/drawing/2014/main" id="{B3A4614B-5B42-4A8F-8635-DF83C00472EF}"/>
+              </a:ext>
+            </a:extLst>
+          </p:cNvPr>
+          <p:cNvSpPr>
+            <a:spLocks noGrp="1"/>
+          </p:cNvSpPr>
+          <p:nvPr>
+            <p:ph type="sldNum" sz="quarter" idx="12"/>
+          </p:nvPr>
+        </p:nvSpPr>
+        <p:spPr/>
+        <p:txBody>
+          <a:bodyPr/>
+          <a:lstStyle/>
+          <a:p>
+            <a:fld id="{9C583E25-F424-4E62-AB77-2CD20878E81E}" type="slidenum">
+              <a:rPr lang="ru-RU" smtClean="0"/>
+              <a:t>12</a:t>
+            </a:fld>
+            <a:endParaRPr lang="ru-RU" dirty="0"/>
+          </a:p>
+        </p:txBody>
+      </p:sp>
+    </p:spTree>
+    <p:extLst>
+      <p:ext uri="{BB962C8B-B14F-4D97-AF65-F5344CB8AC3E}">
+        <p14:creationId xmlns:p14="http://schemas.microsoft.com/office/powerpoint/2010/main" val="3382506471"/>
+      </p:ext>
+    </p:extLst>
+  </p:cSld>
+  <p:clrMapOvr>
+    <a:masterClrMapping/>
+  </p:clrMapOvr>
+  <p:timing>
+    <p:tnLst>
+      <p:par>
+        <p:cTn id="1" dur="indefinite" restart="never" nodeType="tmRoot"/>
+      </p:par>
+    </p:tnLst>
+  </p:timing>
+</p:sld>
+</file>
+
+<file path=ppt/slides/slide13.xml><?xml version="1.0" encoding="utf-8"?>
+<p:sld xmlns:a="http://schemas.openxmlformats.org/drawingml/2006/main" xmlns:r="http://schemas.openxmlformats.org/officeDocument/2006/relationships" xmlns:p="http://schemas.openxmlformats.org/presentationml/2006/main">
+  <p:cSld>
+    <p:spTree>
+      <p:nvGrpSpPr>
+        <p:cNvPr id="1" name=""/>
+        <p:cNvGrpSpPr/>
+        <p:nvPr/>
+      </p:nvGrpSpPr>
+      <p:grpSpPr>
+        <a:xfrm>
+          <a:off x="0" y="0"/>
+          <a:ext cx="0" cy="0"/>
+          <a:chOff x="0" y="0"/>
+          <a:chExt cx="0" cy="0"/>
+        </a:xfrm>
+      </p:grpSpPr>
+      <p:sp>
+        <p:nvSpPr>
+          <p:cNvPr id="2" name="Заголовок 1">
+            <a:extLst>
+              <a:ext uri="{FF2B5EF4-FFF2-40B4-BE49-F238E27FC236}">
                 <a16:creationId xmlns:a16="http://schemas.microsoft.com/office/drawing/2014/main" id="{AC22817A-3C99-4ECA-8A31-407B52EA01F8}"/>
               </a:ext>
             </a:extLst>
@@ -6937,9 +7502,9 @@
           <a:p>
             <a:fld id="{9C583E25-F424-4E62-AB77-2CD20878E81E}" type="slidenum">
               <a:rPr lang="ru-RU" smtClean="0"/>
-              <a:t>10</a:t>
+              <a:t>13</a:t>
             </a:fld>
-            <a:endParaRPr lang="ru-RU"/>
+            <a:endParaRPr lang="ru-RU" dirty="0"/>
           </a:p>
         </p:txBody>
       </p:sp>
@@ -7069,14 +7634,14 @@
                 <a:latin typeface="Times New Roman" panose="02020603050405020304" pitchFamily="18" charset="0"/>
                 <a:cs typeface="Times New Roman" panose="02020603050405020304" pitchFamily="18" charset="0"/>
               </a:rPr>
-              <a:t>ВКонтакте</a:t>
+              <a:t>Вконтакте</a:t>
             </a:r>
             <a:r>
               <a:rPr lang="ru-RU" sz="2400" dirty="0" smtClean="0">
                 <a:latin typeface="Times New Roman" panose="02020603050405020304" pitchFamily="18" charset="0"/>
                 <a:cs typeface="Times New Roman" panose="02020603050405020304" pitchFamily="18" charset="0"/>
               </a:rPr>
-              <a:t>, структурировать их и сохранять в базе данных. </a:t>
+              <a:t> и строить различные группы на их основе. </a:t>
             </a:r>
             <a:r>
               <a:rPr lang="ru-RU" sz="2400" dirty="0">
@@ -7111,7 +7676,30 @@
                 <a:latin typeface="Times New Roman" panose="02020603050405020304" pitchFamily="18" charset="0"/>
                 <a:cs typeface="Times New Roman" panose="02020603050405020304" pitchFamily="18" charset="0"/>
               </a:rPr>
-              <a:t>Разработать алгоритм для извлечения данных с учетом требований безопасности и ограничений </a:t>
+              <a:t>Изучить специализированные методы для извлечения данных пользователей из социальных сетей;</a:t>
+            </a:r>
+            <a:endParaRPr lang="ru-RU" sz="2400" dirty="0">
+              <a:latin typeface="Times New Roman" panose="02020603050405020304" pitchFamily="18" charset="0"/>
+              <a:cs typeface="Times New Roman" panose="02020603050405020304" pitchFamily="18" charset="0"/>
+            </a:endParaRPr>
+          </a:p>
+          <a:p>
+            <a:pPr marL="0" indent="0">
+              <a:buNone/>
+            </a:pPr>
+            <a:r>
+              <a:rPr lang="ru-RU" sz="2400" dirty="0">
+                <a:latin typeface="Times New Roman" panose="02020603050405020304" pitchFamily="18" charset="0"/>
+                <a:cs typeface="Times New Roman" panose="02020603050405020304" pitchFamily="18" charset="0"/>
+              </a:rPr>
+              <a:t>2)	</a:t>
+            </a:r>
+            <a:r>
+              <a:rPr lang="ru-RU" sz="2400" dirty="0" smtClean="0">
+                <a:latin typeface="Times New Roman" panose="02020603050405020304" pitchFamily="18" charset="0"/>
+                <a:cs typeface="Times New Roman" panose="02020603050405020304" pitchFamily="18" charset="0"/>
+              </a:rPr>
+              <a:t>Доработать алгоритм для извлечения данных с учетом требований безопасности и ограничений </a:t>
             </a:r>
             <a:r>
               <a:rPr lang="en-US" sz="2400" dirty="0" smtClean="0">
@@ -7141,51 +7729,28 @@
                 <a:latin typeface="Times New Roman" panose="02020603050405020304" pitchFamily="18" charset="0"/>
                 <a:cs typeface="Times New Roman" panose="02020603050405020304" pitchFamily="18" charset="0"/>
               </a:rPr>
-              <a:t>2)	</a:t>
+              <a:t>3)	</a:t>
             </a:r>
             <a:r>
               <a:rPr lang="ru-RU" sz="2400" dirty="0" smtClean="0">
                 <a:latin typeface="Times New Roman" panose="02020603050405020304" pitchFamily="18" charset="0"/>
                 <a:cs typeface="Times New Roman" panose="02020603050405020304" pitchFamily="18" charset="0"/>
               </a:rPr>
-              <a:t>Спроектировать и создать базу данных для хранения информации о пользователях;</a:t>
-            </a:r>
-            <a:endParaRPr lang="ru-RU" sz="2400" dirty="0">
-              <a:latin typeface="Times New Roman" panose="02020603050405020304" pitchFamily="18" charset="0"/>
-              <a:cs typeface="Times New Roman" panose="02020603050405020304" pitchFamily="18" charset="0"/>
-            </a:endParaRPr>
-          </a:p>
-          <a:p>
-            <a:pPr marL="0" indent="0">
-              <a:buNone/>
-            </a:pPr>
-            <a:r>
-              <a:rPr lang="ru-RU" sz="2400" dirty="0">
+              <a:t>Реализовать программу, которая будет анализировать и визуализировать полученные через </a:t>
+            </a:r>
+            <a:r>
+              <a:rPr lang="en-US" sz="2400" dirty="0" smtClean="0">
                 <a:latin typeface="Times New Roman" panose="02020603050405020304" pitchFamily="18" charset="0"/>
                 <a:cs typeface="Times New Roman" panose="02020603050405020304" pitchFamily="18" charset="0"/>
               </a:rPr>
-              <a:t>3)	</a:t>
+              <a:t>API </a:t>
             </a:r>
             <a:r>
               <a:rPr lang="ru-RU" sz="2400" dirty="0" smtClean="0">
                 <a:latin typeface="Times New Roman" panose="02020603050405020304" pitchFamily="18" charset="0"/>
                 <a:cs typeface="Times New Roman" panose="02020603050405020304" pitchFamily="18" charset="0"/>
               </a:rPr>
-              <a:t>Реализовать программу, которая будет запрашивать данные через </a:t>
-            </a:r>
-            <a:r>
-              <a:rPr lang="en-US" sz="2400" dirty="0" smtClean="0">
-                <a:latin typeface="Times New Roman" panose="02020603050405020304" pitchFamily="18" charset="0"/>
-                <a:cs typeface="Times New Roman" panose="02020603050405020304" pitchFamily="18" charset="0"/>
-              </a:rPr>
-              <a:t>API</a:t>
-            </a:r>
-            <a:r>
-              <a:rPr lang="ru-RU" sz="2400" dirty="0" smtClean="0">
-                <a:latin typeface="Times New Roman" panose="02020603050405020304" pitchFamily="18" charset="0"/>
-                <a:cs typeface="Times New Roman" panose="02020603050405020304" pitchFamily="18" charset="0"/>
-              </a:rPr>
-              <a:t>, обрабатывать ответы и сохранять информацию в базу данных.</a:t>
+              <a:t>данные.</a:t>
             </a:r>
             <a:endParaRPr lang="ru-RU" sz="2400" dirty="0">
               <a:latin typeface="Times New Roman" panose="02020603050405020304" pitchFamily="18" charset="0"/>
@@ -7848,7 +8413,7 @@
               <a:rPr lang="ru-RU" smtClean="0"/>
               <a:t>6</a:t>
             </a:fld>
-            <a:endParaRPr lang="ru-RU"/>
+            <a:endParaRPr lang="ru-RU" dirty="0"/>
           </a:p>
         </p:txBody>
       </p:sp>
@@ -7990,7 +8555,7 @@
               <a:rPr lang="ru-RU" smtClean="0"/>
               <a:t>7</a:t>
             </a:fld>
-            <a:endParaRPr lang="ru-RU"/>
+            <a:endParaRPr lang="ru-RU" dirty="0"/>
           </a:p>
         </p:txBody>
       </p:sp>
@@ -8145,7 +8710,7 @@
               <a:rPr lang="ru-RU" smtClean="0"/>
               <a:t>8</a:t>
             </a:fld>
-            <a:endParaRPr lang="ru-RU"/>
+            <a:endParaRPr lang="ru-RU" dirty="0"/>
           </a:p>
         </p:txBody>
       </p:sp>
@@ -8213,7 +8778,7 @@
           <p:cNvPr id="2" name="Заголовок 1">
             <a:extLst>
               <a:ext uri="{FF2B5EF4-FFF2-40B4-BE49-F238E27FC236}">
-                <a16:creationId xmlns:a16="http://schemas.microsoft.com/office/drawing/2014/main" id="{6018217D-050D-4C6C-AC36-3B7141D19618}"/>
+                <a16:creationId xmlns:a16="http://schemas.microsoft.com/office/drawing/2014/main" id="{3FF7B919-DE1E-4C1D-A147-B825BE3277D0}"/>
               </a:ext>
             </a:extLst>
           </p:cNvPr>
@@ -8226,120 +8791,59 @@
         </p:nvSpPr>
         <p:spPr>
           <a:xfrm>
-            <a:off x="838200" y="365126"/>
-            <a:ext cx="10515600" cy="713866"/>
+            <a:off x="838200" y="136526"/>
+            <a:ext cx="10515600" cy="925020"/>
           </a:xfrm>
         </p:spPr>
         <p:txBody>
           <a:bodyPr>
-            <a:normAutofit/>
+            <a:normAutofit fontScale="90000"/>
           </a:bodyPr>
           <a:lstStyle/>
           <a:p>
             <a:pPr algn="ctr"/>
             <a:r>
-              <a:rPr lang="ru-RU" sz="3600" dirty="0">
-                <a:latin typeface="Times New Roman" panose="02020603050405020304" pitchFamily="18" charset="0"/>
-                <a:cs typeface="Times New Roman" panose="02020603050405020304" pitchFamily="18" charset="0"/>
-              </a:rPr>
-              <a:t>Итак, в курсовой работе:</a:t>
-            </a:r>
-          </a:p>
-        </p:txBody>
-      </p:sp>
-      <p:sp>
-        <p:nvSpPr>
-          <p:cNvPr id="3" name="Объект 2">
-            <a:extLst>
-              <a:ext uri="{FF2B5EF4-FFF2-40B4-BE49-F238E27FC236}">
-                <a16:creationId xmlns:a16="http://schemas.microsoft.com/office/drawing/2014/main" id="{7F9E0BEE-61E6-4297-A96C-FA07970DEF71}"/>
-              </a:ext>
-            </a:extLst>
-          </p:cNvPr>
-          <p:cNvSpPr>
-            <a:spLocks noGrp="1"/>
-          </p:cNvSpPr>
-          <p:nvPr>
-            <p:ph idx="1"/>
-          </p:nvPr>
-        </p:nvSpPr>
-        <p:spPr>
-          <a:xfrm>
-            <a:off x="838200" y="2140870"/>
-            <a:ext cx="10515600" cy="3006166"/>
-          </a:xfrm>
-        </p:spPr>
-        <p:txBody>
-          <a:bodyPr>
-            <a:normAutofit/>
-          </a:bodyPr>
-          <a:lstStyle/>
-          <a:p>
+              <a:rPr lang="ru-RU" dirty="0" smtClean="0"/>
+              <a:t>Группировка </a:t>
+            </a:r>
+            <a:r>
+              <a:rPr lang="ru-RU" dirty="0"/>
+              <a:t>пользователей по числу подписчиков и </a:t>
+            </a:r>
+            <a:r>
+              <a:rPr lang="ru-RU" dirty="0" smtClean="0"/>
+              <a:t>возрасту</a:t>
+            </a:r>
             <a:r>
               <a:rPr lang="ru-RU" dirty="0" smtClean="0">
                 <a:latin typeface="Times New Roman" panose="02020603050405020304" pitchFamily="18" charset="0"/>
                 <a:cs typeface="Times New Roman" panose="02020603050405020304" pitchFamily="18" charset="0"/>
               </a:rPr>
-              <a:t>Разработан алгоритм для  извлечения данных с учетом требований безопасности и ограничений </a:t>
-            </a:r>
-            <a:r>
-              <a:rPr lang="en-US" dirty="0" smtClean="0">
-                <a:latin typeface="Times New Roman" panose="02020603050405020304" pitchFamily="18" charset="0"/>
-                <a:cs typeface="Times New Roman" panose="02020603050405020304" pitchFamily="18" charset="0"/>
-              </a:rPr>
-              <a:t>API</a:t>
-            </a:r>
-            <a:r>
-              <a:rPr lang="ru-RU" dirty="0" smtClean="0">
-                <a:latin typeface="Times New Roman" panose="02020603050405020304" pitchFamily="18" charset="0"/>
-                <a:cs typeface="Times New Roman" panose="02020603050405020304" pitchFamily="18" charset="0"/>
-              </a:rPr>
-              <a:t>;</a:t>
+              <a:t> </a:t>
             </a:r>
             <a:endParaRPr lang="ru-RU" dirty="0">
               <a:latin typeface="Times New Roman" panose="02020603050405020304" pitchFamily="18" charset="0"/>
               <a:cs typeface="Times New Roman" panose="02020603050405020304" pitchFamily="18" charset="0"/>
             </a:endParaRPr>
           </a:p>
-          <a:p>
-            <a:r>
-              <a:rPr lang="ru-RU" dirty="0" smtClean="0">
-                <a:latin typeface="Times New Roman" panose="02020603050405020304" pitchFamily="18" charset="0"/>
-                <a:cs typeface="Times New Roman" panose="02020603050405020304" pitchFamily="18" charset="0"/>
-              </a:rPr>
-              <a:t>Спроектирована и создана база данных для хранения информации о пользователях</a:t>
-            </a:r>
-            <a:endParaRPr lang="ru-RU" dirty="0">
-              <a:latin typeface="Times New Roman" panose="02020603050405020304" pitchFamily="18" charset="0"/>
-              <a:cs typeface="Times New Roman" panose="02020603050405020304" pitchFamily="18" charset="0"/>
-            </a:endParaRPr>
-          </a:p>
-          <a:p>
-            <a:r>
-              <a:rPr lang="ru-RU" dirty="0" smtClean="0">
-                <a:latin typeface="Times New Roman" panose="02020603050405020304" pitchFamily="18" charset="0"/>
-                <a:cs typeface="Times New Roman" panose="02020603050405020304" pitchFamily="18" charset="0"/>
-              </a:rPr>
-              <a:t>Реализована программа, которая запрашивает данные через </a:t>
-            </a:r>
-            <a:r>
-              <a:rPr lang="en-US" dirty="0" smtClean="0">
-                <a:latin typeface="Times New Roman" panose="02020603050405020304" pitchFamily="18" charset="0"/>
-                <a:cs typeface="Times New Roman" panose="02020603050405020304" pitchFamily="18" charset="0"/>
-              </a:rPr>
-              <a:t>API</a:t>
-            </a:r>
-            <a:r>
-              <a:rPr lang="ru-RU" dirty="0" smtClean="0">
-                <a:latin typeface="Times New Roman" panose="02020603050405020304" pitchFamily="18" charset="0"/>
-                <a:cs typeface="Times New Roman" panose="02020603050405020304" pitchFamily="18" charset="0"/>
-              </a:rPr>
-              <a:t>, обрабатывает ответы и сохраняет информацию в базу данных</a:t>
-            </a:r>
-            <a:endParaRPr lang="ru-RU" dirty="0">
-              <a:latin typeface="Times New Roman" panose="02020603050405020304" pitchFamily="18" charset="0"/>
-              <a:cs typeface="Times New Roman" panose="02020603050405020304" pitchFamily="18" charset="0"/>
-            </a:endParaRPr>
+        </p:txBody>
+      </p:sp>
+      <p:sp>
+        <p:nvSpPr>
+          <p:cNvPr id="3" name="Объект 2"/>
+          <p:cNvSpPr>
+            <a:spLocks noGrp="1"/>
+          </p:cNvSpPr>
+          <p:nvPr>
+            <p:ph idx="1"/>
+          </p:nvPr>
+        </p:nvSpPr>
+        <p:spPr/>
+        <p:txBody>
+          <a:bodyPr/>
+          <a:lstStyle/>
+          <a:p>
+            <a:endParaRPr lang="ru-RU" dirty="0"/>
           </a:p>
         </p:txBody>
       </p:sp>
@@ -8348,7 +8852,7 @@
           <p:cNvPr id="4" name="Номер слайда 3">
             <a:extLst>
               <a:ext uri="{FF2B5EF4-FFF2-40B4-BE49-F238E27FC236}">
-                <a16:creationId xmlns:a16="http://schemas.microsoft.com/office/drawing/2014/main" id="{B3A4614B-5B42-4A8F-8635-DF83C00472EF}"/>
+                <a16:creationId xmlns:a16="http://schemas.microsoft.com/office/drawing/2014/main" id="{05CCAD02-D324-4E74-BBB2-F96D3E7B6AC4}"/>
               </a:ext>
             </a:extLst>
           </p:cNvPr>
@@ -8368,14 +8872,36 @@
               <a:rPr lang="ru-RU" smtClean="0"/>
               <a:t>9</a:t>
             </a:fld>
-            <a:endParaRPr lang="ru-RU"/>
-          </a:p>
-        </p:txBody>
-      </p:sp>
+            <a:endParaRPr lang="ru-RU" dirty="0"/>
+          </a:p>
+        </p:txBody>
+      </p:sp>
+      <p:pic>
+        <p:nvPicPr>
+          <p:cNvPr id="7" name="Рисунок 6"/>
+          <p:cNvPicPr/>
+          <p:nvPr/>
+        </p:nvPicPr>
+        <p:blipFill>
+          <a:blip r:embed="rId2"/>
+          <a:stretch>
+            <a:fillRect/>
+          </a:stretch>
+        </p:blipFill>
+        <p:spPr>
+          <a:xfrm>
+            <a:off x="1716086" y="1546571"/>
+            <a:ext cx="9055553" cy="4701828"/>
+          </a:xfrm>
+          <a:prstGeom prst="rect">
+            <a:avLst/>
+          </a:prstGeom>
+        </p:spPr>
+      </p:pic>
     </p:spTree>
     <p:extLst>
       <p:ext uri="{BB962C8B-B14F-4D97-AF65-F5344CB8AC3E}">
-        <p14:creationId xmlns:p14="http://schemas.microsoft.com/office/powerpoint/2010/main" val="3382506471"/>
+        <p14:creationId xmlns:p14="http://schemas.microsoft.com/office/powerpoint/2010/main" val="1601083044"/>
       </p:ext>
     </p:extLst>
   </p:cSld>
